--- a/dist/초3/수학/도형과측정/초3_수학_도형과측정_01_선분·반직선·직선과각.pptx
+++ b/dist/초3/수학/도형과측정/초3_수학_도형과측정_01_선분·반직선·직선과각.pptx
@@ -121,13 +121,13 @@
   <p:extLst>
     <p:ext uri="{521415D9-36F7-43E2-AB2F-B90AF26B5E84}">
       <p14:sectionLst xmlns:p14="http://schemas.microsoft.com/office/powerpoint/2010/main">
-        <p14:section name="도입" id="{195b2230-77f6-e2d7-3365-cf6f64689169}">
+        <p14:section name="도입" id="{9e62d88f-2edb-aee6-a3a5-a62c39fcc07e}">
           <p14:sldIdLst>
             <p14:sldId id="256"/>
             <p14:sldId id="257"/>
           </p14:sldIdLst>
         </p14:section>
-        <p14:section name="개념" id="{b1167fc8-cab6-0b1e-3c40-09482503f349}">
+        <p14:section name="개념" id="{4d2d05b2-c3da-09fc-b4ee-ef40724e9bc2}">
           <p14:sldIdLst>
             <p14:sldId id="258"/>
             <p14:sldId id="259"/>
@@ -135,7 +135,7 @@
             <p14:sldId id="263"/>
           </p14:sldIdLst>
         </p14:section>
-        <p14:section name="연습" id="{8133e877-8d1c-8a1a-7585-250697bee014}">
+        <p14:section name="연습" id="{a047e461-6419-1a20-50d6-f59261dc1288}">
           <p14:sldIdLst>
             <p14:sldId id="261"/>
             <p14:sldId id="262"/>
@@ -143,25 +143,25 @@
             <p14:sldId id="265"/>
           </p14:sldIdLst>
         </p14:section>
-        <p14:section name="개념" id="{c8fcdcda-556c-8fa6-b634-d9283459cafc}">
+        <p14:section name="개념" id="{7f386b24-62bd-e476-6d73-0fffe41de1f5}">
           <p14:sldIdLst/>
         </p14:section>
-        <p14:section name="연습" id="{237b6e7e-56b3-cfc1-5a10-ef0e63c448d1}">
+        <p14:section name="연습" id="{3dab9f06-1b51-a05c-5b72-f1430a22e80b}">
           <p14:sldIdLst/>
         </p14:section>
-        <p14:section name="확인" id="{72b05a31-4d19-d547-6f26-24bd3c461d7e}">
+        <p14:section name="확인" id="{fc778ed4-71de-78fb-19c2-757de88c10e1}">
           <p14:sldIdLst>
             <p14:sldId id="266"/>
             <p14:sldId id="267"/>
             <p14:sldId id="268"/>
           </p14:sldIdLst>
         </p14:section>
-        <p14:section name="정리" id="{6cabb464-0cce-54b4-f2ff-721211fa62aa}">
+        <p14:section name="정리" id="{9bd4fd62-969f-8ad9-790c-13d847a1016f}">
           <p14:sldIdLst>
             <p14:sldId id="269"/>
           </p14:sldIdLst>
         </p14:section>
-        <p14:section name="보충" id="{c7632dfc-af36-8bdd-6712-cb2dc61f44d5}">
+        <p14:section name="보충" id="{f3c0186f-e299-8928-11e0-158690cf0668}">
           <p14:sldIdLst>
             <p14:sldId id="270"/>
           </p14:sldIdLst>
@@ -3090,7 +3090,7 @@
               <a:buNone/>
             </a:pPr>
             <a:r>
-              <a:rPr lang="ko-KR" altLang="en-US" sz="4600" b="1" dirty="0">
+              <a:rPr lang="ko-KR" altLang="en-US" sz="4200" b="1" dirty="0">
                 <a:solidFill>
                   <a:srgbClr val="FFFFFF"/>
                 </a:solidFill>
@@ -3180,7 +3180,7 @@
         </p:nvSpPr>
         <p:spPr>
           <a:xfrm>
-            <a:off x="7892681" y="2682240"/>
+            <a:off x="7722931" y="2804160"/>
             <a:ext cx="792480" cy="792480"/>
           </a:xfrm>
           <a:prstGeom prst="pie">
@@ -3208,8 +3208,8 @@
         </p:nvSpPr>
         <p:spPr>
           <a:xfrm flipV="1">
-            <a:off x="8288921" y="1127760"/>
-            <a:ext cx="1300480" cy="1950720"/>
+            <a:off x="8119171" y="1005840"/>
+            <a:ext cx="1463040" cy="2194560"/>
           </a:xfrm>
           <a:prstGeom prst="line">
             <a:avLst/>
@@ -3231,8 +3231,8 @@
         </p:nvSpPr>
         <p:spPr>
           <a:xfrm>
-            <a:off x="8288921" y="3078480"/>
-            <a:ext cx="2715997" cy="0"/>
+            <a:off x="8119171" y="3200400"/>
+            <a:ext cx="3055497" cy="0"/>
           </a:xfrm>
           <a:prstGeom prst="line">
             <a:avLst/>
@@ -3254,7 +3254,7 @@
         </p:nvSpPr>
         <p:spPr>
           <a:xfrm>
-            <a:off x="9195173" y="1570512"/>
+            <a:off x="9146134" y="1511366"/>
             <a:ext cx="118872" cy="118872"/>
           </a:xfrm>
           <a:prstGeom prst="ellipse">
@@ -3279,7 +3279,7 @@
         </p:nvSpPr>
         <p:spPr>
           <a:xfrm>
-            <a:off x="8229485" y="3019044"/>
+            <a:off x="8059735" y="3140964"/>
             <a:ext cx="118872" cy="118872"/>
           </a:xfrm>
           <a:prstGeom prst="ellipse">
@@ -3304,7 +3304,7 @@
         </p:nvSpPr>
         <p:spPr>
           <a:xfrm>
-            <a:off x="10341928" y="3019044"/>
+            <a:off x="10436233" y="3140964"/>
             <a:ext cx="118872" cy="118872"/>
           </a:xfrm>
           <a:prstGeom prst="ellipse">
@@ -3329,8 +3329,8 @@
         </p:nvSpPr>
         <p:spPr>
           <a:xfrm>
-            <a:off x="8847506" y="1304190"/>
-            <a:ext cx="408432" cy="381000"/>
+            <a:off x="8748683" y="1181544"/>
+            <a:ext cx="508000" cy="508000"/>
           </a:xfrm>
           <a:prstGeom prst="rect">
             <a:avLst/>
@@ -3346,7 +3346,7 @@
               <a:buNone/>
             </a:pPr>
             <a:r>
-              <a:rPr lang="ko-KR" altLang="en-US" sz="2400" b="1" dirty="0">
+              <a:rPr lang="ko-KR" altLang="en-US" sz="3200" b="1" dirty="0">
                 <a:solidFill>
                   <a:srgbClr val="1F2937"/>
                 </a:solidFill>
@@ -3356,7 +3356,7 @@
               </a:rPr>
               <a:t>ㄱ</a:t>
             </a:r>
-            <a:endParaRPr lang="ko-KR" sz="2400" dirty="0"/>
+            <a:endParaRPr lang="ko-KR" sz="3200" dirty="0"/>
           </a:p>
         </p:txBody>
       </p:sp>
@@ -3368,8 +3368,8 @@
         </p:nvSpPr>
         <p:spPr>
           <a:xfrm>
-            <a:off x="7869718" y="3003038"/>
-            <a:ext cx="408432" cy="381000"/>
+            <a:off x="7650184" y="3061458"/>
+            <a:ext cx="508000" cy="508000"/>
           </a:xfrm>
           <a:prstGeom prst="rect">
             <a:avLst/>
@@ -3385,7 +3385,7 @@
               <a:buNone/>
             </a:pPr>
             <a:r>
-              <a:rPr lang="ko-KR" altLang="en-US" sz="2400" b="1" dirty="0">
+              <a:rPr lang="ko-KR" altLang="en-US" sz="3200" b="1" dirty="0">
                 <a:solidFill>
                   <a:srgbClr val="1F2937"/>
                 </a:solidFill>
@@ -3395,7 +3395,7 @@
               </a:rPr>
               <a:t>ㄴ</a:t>
             </a:r>
-            <a:endParaRPr lang="ko-KR" sz="2400" dirty="0"/>
+            <a:endParaRPr lang="ko-KR" sz="3200" dirty="0"/>
           </a:p>
         </p:txBody>
       </p:sp>
@@ -3407,8 +3407,8 @@
         </p:nvSpPr>
         <p:spPr>
           <a:xfrm>
-            <a:off x="10197148" y="2644140"/>
-            <a:ext cx="408432" cy="381000"/>
+            <a:off x="10241669" y="2702560"/>
+            <a:ext cx="508000" cy="508000"/>
           </a:xfrm>
           <a:prstGeom prst="rect">
             <a:avLst/>
@@ -3424,7 +3424,7 @@
               <a:buNone/>
             </a:pPr>
             <a:r>
-              <a:rPr lang="ko-KR" altLang="en-US" sz="2400" b="1" dirty="0">
+              <a:rPr lang="ko-KR" altLang="en-US" sz="3200" b="1" dirty="0">
                 <a:solidFill>
                   <a:srgbClr val="1F2937"/>
                 </a:solidFill>
@@ -3434,7 +3434,7 @@
               </a:rPr>
               <a:t>ㄷ</a:t>
             </a:r>
-            <a:endParaRPr lang="ko-KR" sz="2400" dirty="0"/>
+            <a:endParaRPr lang="ko-KR" sz="3200" dirty="0"/>
           </a:p>
         </p:txBody>
       </p:sp>
@@ -4169,8 +4169,8 @@
         </p:nvSpPr>
         <p:spPr>
           <a:xfrm flipH="1">
-            <a:off x="1831848" y="2538578"/>
-            <a:ext cx="3592068" cy="957885"/>
+            <a:off x="1709928" y="2506066"/>
+            <a:ext cx="3835908" cy="1022909"/>
           </a:xfrm>
           <a:prstGeom prst="line">
             <a:avLst/>
@@ -4192,7 +4192,7 @@
         </p:nvSpPr>
         <p:spPr>
           <a:xfrm>
-            <a:off x="5364480" y="2479142"/>
+            <a:off x="5486400" y="2446630"/>
             <a:ext cx="118872" cy="118872"/>
           </a:xfrm>
           <a:prstGeom prst="ellipse">
@@ -4217,7 +4217,7 @@
         </p:nvSpPr>
         <p:spPr>
           <a:xfrm>
-            <a:off x="2942509" y="3125001"/>
+            <a:off x="2900018" y="3136331"/>
             <a:ext cx="118872" cy="118872"/>
           </a:xfrm>
           <a:prstGeom prst="ellipse">
@@ -4242,8 +4242,8 @@
         </p:nvSpPr>
         <p:spPr>
           <a:xfrm>
-            <a:off x="5455307" y="2285249"/>
-            <a:ext cx="408432" cy="381000"/>
+            <a:off x="5527443" y="2189237"/>
+            <a:ext cx="508000" cy="508000"/>
           </a:xfrm>
           <a:prstGeom prst="rect">
             <a:avLst/>
@@ -4259,7 +4259,7 @@
               <a:buNone/>
             </a:pPr>
             <a:r>
-              <a:rPr lang="ko-KR" altLang="en-US" sz="2400" b="1" dirty="0">
+              <a:rPr lang="ko-KR" altLang="en-US" sz="3200" b="1" dirty="0">
                 <a:solidFill>
                   <a:srgbClr val="1F2937"/>
                 </a:solidFill>
@@ -4269,7 +4269,7 @@
               </a:rPr>
               <a:t>ㅌ</a:t>
             </a:r>
-            <a:endParaRPr lang="ko-KR" sz="2400" dirty="0"/>
+            <a:endParaRPr lang="ko-KR" sz="3200" dirty="0"/>
           </a:p>
         </p:txBody>
       </p:sp>
@@ -4281,8 +4281,8 @@
         </p:nvSpPr>
         <p:spPr>
           <a:xfrm>
-            <a:off x="2734900" y="2758330"/>
-            <a:ext cx="408432" cy="381000"/>
+            <a:off x="2642626" y="2706161"/>
+            <a:ext cx="508000" cy="508000"/>
           </a:xfrm>
           <a:prstGeom prst="rect">
             <a:avLst/>
@@ -4298,7 +4298,7 @@
               <a:buNone/>
             </a:pPr>
             <a:r>
-              <a:rPr lang="ko-KR" altLang="en-US" sz="2400" b="1" dirty="0">
+              <a:rPr lang="ko-KR" altLang="en-US" sz="3200" b="1" dirty="0">
                 <a:solidFill>
                   <a:srgbClr val="1F2937"/>
                 </a:solidFill>
@@ -4308,7 +4308,7 @@
               </a:rPr>
               <a:t>ㅋ</a:t>
             </a:r>
-            <a:endParaRPr lang="ko-KR" sz="2400" dirty="0"/>
+            <a:endParaRPr lang="ko-KR" sz="3200" dirty="0"/>
           </a:p>
         </p:txBody>
       </p:sp>
@@ -4440,8 +4440,8 @@
         </p:nvSpPr>
         <p:spPr>
           <a:xfrm>
-            <a:off x="7311848" y="2511500"/>
-            <a:ext cx="408432" cy="381000"/>
+            <a:off x="7262064" y="2448000"/>
+            <a:ext cx="508000" cy="508000"/>
           </a:xfrm>
           <a:prstGeom prst="rect">
             <a:avLst/>
@@ -4457,7 +4457,7 @@
               <a:buNone/>
             </a:pPr>
             <a:r>
-              <a:rPr lang="ko-KR" altLang="en-US" sz="2400" b="1" dirty="0">
+              <a:rPr lang="ko-KR" altLang="en-US" sz="3200" b="1" dirty="0">
                 <a:solidFill>
                   <a:srgbClr val="1F2937"/>
                 </a:solidFill>
@@ -4467,7 +4467,7 @@
               </a:rPr>
               <a:t>ㅍ</a:t>
             </a:r>
-            <a:endParaRPr lang="ko-KR" sz="2400" dirty="0"/>
+            <a:endParaRPr lang="ko-KR" sz="3200" dirty="0"/>
           </a:p>
         </p:txBody>
       </p:sp>
@@ -4479,8 +4479,8 @@
         </p:nvSpPr>
         <p:spPr>
           <a:xfrm>
-            <a:off x="10992916" y="3142540"/>
-            <a:ext cx="408432" cy="381000"/>
+            <a:off x="10943132" y="3079040"/>
+            <a:ext cx="508000" cy="508000"/>
           </a:xfrm>
           <a:prstGeom prst="rect">
             <a:avLst/>
@@ -4496,7 +4496,7 @@
               <a:buNone/>
             </a:pPr>
             <a:r>
-              <a:rPr lang="ko-KR" altLang="en-US" sz="2400" b="1" dirty="0">
+              <a:rPr lang="ko-KR" altLang="en-US" sz="3200" b="1" dirty="0">
                 <a:solidFill>
                   <a:srgbClr val="1F2937"/>
                 </a:solidFill>
@@ -4506,7 +4506,7 @@
               </a:rPr>
               <a:t>ㅎ</a:t>
             </a:r>
-            <a:endParaRPr lang="ko-KR" sz="2400" dirty="0"/>
+            <a:endParaRPr lang="ko-KR" sz="3200" dirty="0"/>
           </a:p>
         </p:txBody>
       </p:sp>
@@ -7286,8 +7286,8 @@
         </p:nvSpPr>
         <p:spPr>
           <a:xfrm flipV="1">
-            <a:off x="1036320" y="2908021"/>
-            <a:ext cx="4387596" cy="1316279"/>
+            <a:off x="944118" y="2880360"/>
+            <a:ext cx="4572000" cy="1371600"/>
           </a:xfrm>
           <a:prstGeom prst="line">
             <a:avLst/>
@@ -7309,7 +7309,7 @@
         </p:nvSpPr>
         <p:spPr>
           <a:xfrm>
-            <a:off x="976884" y="4164863"/>
+            <a:off x="884682" y="4192524"/>
             <a:ext cx="118872" cy="118872"/>
           </a:xfrm>
           <a:prstGeom prst="ellipse">
@@ -7334,7 +7334,7 @@
         </p:nvSpPr>
         <p:spPr>
           <a:xfrm>
-            <a:off x="5364480" y="2848585"/>
+            <a:off x="5456682" y="2820924"/>
             <a:ext cx="118872" cy="118872"/>
           </a:xfrm>
           <a:prstGeom prst="ellipse">
@@ -7359,8 +7359,8 @@
         </p:nvSpPr>
         <p:spPr>
           <a:xfrm>
-            <a:off x="598548" y="4103866"/>
-            <a:ext cx="408432" cy="381000"/>
+            <a:off x="456562" y="4068027"/>
+            <a:ext cx="508000" cy="508000"/>
           </a:xfrm>
           <a:prstGeom prst="rect">
             <a:avLst/>
@@ -7376,7 +7376,7 @@
               <a:buNone/>
             </a:pPr>
             <a:r>
-              <a:rPr lang="ko-KR" altLang="en-US" sz="2400" b="1" dirty="0">
+              <a:rPr lang="ko-KR" altLang="en-US" sz="3200" b="1" dirty="0">
                 <a:solidFill>
                   <a:srgbClr val="1F2937"/>
                 </a:solidFill>
@@ -7386,7 +7386,7 @@
               </a:rPr>
               <a:t>ㄱ</a:t>
             </a:r>
-            <a:endParaRPr lang="ko-KR" sz="2400" dirty="0"/>
+            <a:endParaRPr lang="ko-KR" sz="3200" dirty="0"/>
           </a:p>
         </p:txBody>
       </p:sp>
@@ -7398,8 +7398,8 @@
         </p:nvSpPr>
         <p:spPr>
           <a:xfrm>
-            <a:off x="5453256" y="2647454"/>
-            <a:ext cx="408432" cy="381000"/>
+            <a:off x="5495674" y="2556293"/>
+            <a:ext cx="508000" cy="508000"/>
           </a:xfrm>
           <a:prstGeom prst="rect">
             <a:avLst/>
@@ -7415,7 +7415,7 @@
               <a:buNone/>
             </a:pPr>
             <a:r>
-              <a:rPr lang="ko-KR" altLang="en-US" sz="2400" b="1" dirty="0">
+              <a:rPr lang="ko-KR" altLang="en-US" sz="3200" b="1" dirty="0">
                 <a:solidFill>
                   <a:srgbClr val="1F2937"/>
                 </a:solidFill>
@@ -7425,7 +7425,7 @@
               </a:rPr>
               <a:t>ㄴ</a:t>
             </a:r>
-            <a:endParaRPr lang="ko-KR" sz="2400" dirty="0"/>
+            <a:endParaRPr lang="ko-KR" sz="3200" dirty="0"/>
           </a:p>
         </p:txBody>
       </p:sp>
@@ -8035,8 +8035,8 @@
         </p:nvSpPr>
         <p:spPr>
           <a:xfrm>
-            <a:off x="1663446" y="3137154"/>
-            <a:ext cx="1254252" cy="0"/>
+            <a:off x="1602486" y="3137154"/>
+            <a:ext cx="1376172" cy="0"/>
           </a:xfrm>
           <a:prstGeom prst="line">
             <a:avLst/>
@@ -8058,7 +8058,7 @@
         </p:nvSpPr>
         <p:spPr>
           <a:xfrm>
-            <a:off x="1604010" y="3077718"/>
+            <a:off x="1543050" y="3077718"/>
             <a:ext cx="118872" cy="118872"/>
           </a:xfrm>
           <a:prstGeom prst="ellipse">
@@ -8083,7 +8083,7 @@
         </p:nvSpPr>
         <p:spPr>
           <a:xfrm>
-            <a:off x="2858262" y="3077718"/>
+            <a:off x="2919222" y="3077718"/>
             <a:ext cx="118872" cy="118872"/>
           </a:xfrm>
           <a:prstGeom prst="ellipse">
@@ -8108,8 +8108,8 @@
         </p:nvSpPr>
         <p:spPr>
           <a:xfrm>
-            <a:off x="1459230" y="3190494"/>
-            <a:ext cx="408432" cy="381000"/>
+            <a:off x="1348486" y="3126994"/>
+            <a:ext cx="508000" cy="508000"/>
           </a:xfrm>
           <a:prstGeom prst="rect">
             <a:avLst/>
@@ -8125,7 +8125,7 @@
               <a:buNone/>
             </a:pPr>
             <a:r>
-              <a:rPr lang="ko-KR" altLang="en-US" sz="2400" b="1" dirty="0">
+              <a:rPr lang="ko-KR" altLang="en-US" sz="3200" b="1" dirty="0">
                 <a:solidFill>
                   <a:srgbClr val="1F2937"/>
                 </a:solidFill>
@@ -8135,7 +8135,7 @@
               </a:rPr>
               <a:t>ㄱ</a:t>
             </a:r>
-            <a:endParaRPr lang="ko-KR" sz="2400" dirty="0"/>
+            <a:endParaRPr lang="ko-KR" sz="3200" dirty="0"/>
           </a:p>
         </p:txBody>
       </p:sp>
@@ -8147,8 +8147,8 @@
         </p:nvSpPr>
         <p:spPr>
           <a:xfrm>
-            <a:off x="2713482" y="3190494"/>
-            <a:ext cx="408432" cy="381000"/>
+            <a:off x="2724658" y="3126994"/>
+            <a:ext cx="508000" cy="508000"/>
           </a:xfrm>
           <a:prstGeom prst="rect">
             <a:avLst/>
@@ -8164,7 +8164,7 @@
               <a:buNone/>
             </a:pPr>
             <a:r>
-              <a:rPr lang="ko-KR" altLang="en-US" sz="2400" b="1" dirty="0">
+              <a:rPr lang="ko-KR" altLang="en-US" sz="3200" b="1" dirty="0">
                 <a:solidFill>
                   <a:srgbClr val="1F2937"/>
                 </a:solidFill>
@@ -8174,7 +8174,7 @@
               </a:rPr>
               <a:t>ㄴ</a:t>
             </a:r>
-            <a:endParaRPr lang="ko-KR" sz="2400" dirty="0"/>
+            <a:endParaRPr lang="ko-KR" sz="3200" dirty="0"/>
           </a:p>
         </p:txBody>
       </p:sp>
@@ -8225,8 +8225,8 @@
         </p:nvSpPr>
         <p:spPr>
           <a:xfrm>
-            <a:off x="5467350" y="3137154"/>
-            <a:ext cx="1881378" cy="0"/>
+            <a:off x="5406390" y="3137154"/>
+            <a:ext cx="2064258" cy="0"/>
           </a:xfrm>
           <a:prstGeom prst="line">
             <a:avLst/>
@@ -8248,7 +8248,7 @@
         </p:nvSpPr>
         <p:spPr>
           <a:xfrm>
-            <a:off x="5407914" y="3077718"/>
+            <a:off x="5346954" y="3077718"/>
             <a:ext cx="118872" cy="118872"/>
           </a:xfrm>
           <a:prstGeom prst="ellipse">
@@ -8273,7 +8273,7 @@
         </p:nvSpPr>
         <p:spPr>
           <a:xfrm>
-            <a:off x="6662166" y="3077718"/>
+            <a:off x="6723126" y="3077718"/>
             <a:ext cx="118872" cy="118872"/>
           </a:xfrm>
           <a:prstGeom prst="ellipse">
@@ -8298,8 +8298,8 @@
         </p:nvSpPr>
         <p:spPr>
           <a:xfrm>
-            <a:off x="5263134" y="3190494"/>
-            <a:ext cx="408432" cy="381000"/>
+            <a:off x="5152390" y="3126994"/>
+            <a:ext cx="508000" cy="508000"/>
           </a:xfrm>
           <a:prstGeom prst="rect">
             <a:avLst/>
@@ -8315,7 +8315,7 @@
               <a:buNone/>
             </a:pPr>
             <a:r>
-              <a:rPr lang="ko-KR" altLang="en-US" sz="2400" b="1" dirty="0">
+              <a:rPr lang="ko-KR" altLang="en-US" sz="3200" b="1" dirty="0">
                 <a:solidFill>
                   <a:srgbClr val="1F2937"/>
                 </a:solidFill>
@@ -8325,7 +8325,7 @@
               </a:rPr>
               <a:t>ㄱ</a:t>
             </a:r>
-            <a:endParaRPr lang="ko-KR" sz="2400" dirty="0"/>
+            <a:endParaRPr lang="ko-KR" sz="3200" dirty="0"/>
           </a:p>
         </p:txBody>
       </p:sp>
@@ -8337,8 +8337,8 @@
         </p:nvSpPr>
         <p:spPr>
           <a:xfrm>
-            <a:off x="6517386" y="3190494"/>
-            <a:ext cx="408432" cy="381000"/>
+            <a:off x="6528562" y="3126994"/>
+            <a:ext cx="508000" cy="508000"/>
           </a:xfrm>
           <a:prstGeom prst="rect">
             <a:avLst/>
@@ -8354,7 +8354,7 @@
               <a:buNone/>
             </a:pPr>
             <a:r>
-              <a:rPr lang="ko-KR" altLang="en-US" sz="2400" b="1" dirty="0">
+              <a:rPr lang="ko-KR" altLang="en-US" sz="3200" b="1" dirty="0">
                 <a:solidFill>
                   <a:srgbClr val="1F2937"/>
                 </a:solidFill>
@@ -8364,7 +8364,7 @@
               </a:rPr>
               <a:t>ㄴ</a:t>
             </a:r>
-            <a:endParaRPr lang="ko-KR" sz="2400" dirty="0"/>
+            <a:endParaRPr lang="ko-KR" sz="3200" dirty="0"/>
           </a:p>
         </p:txBody>
       </p:sp>
@@ -8415,8 +8415,8 @@
         </p:nvSpPr>
         <p:spPr>
           <a:xfrm>
-            <a:off x="8644128" y="3137154"/>
-            <a:ext cx="2508504" cy="0"/>
+            <a:off x="8522208" y="3137154"/>
+            <a:ext cx="2752344" cy="0"/>
           </a:xfrm>
           <a:prstGeom prst="line">
             <a:avLst/>
@@ -8438,7 +8438,7 @@
         </p:nvSpPr>
         <p:spPr>
           <a:xfrm>
-            <a:off x="9211818" y="3077718"/>
+            <a:off x="9150858" y="3077718"/>
             <a:ext cx="118872" cy="118872"/>
           </a:xfrm>
           <a:prstGeom prst="ellipse">
@@ -8463,7 +8463,7 @@
         </p:nvSpPr>
         <p:spPr>
           <a:xfrm>
-            <a:off x="10466070" y="3077718"/>
+            <a:off x="10527030" y="3077718"/>
             <a:ext cx="118872" cy="118872"/>
           </a:xfrm>
           <a:prstGeom prst="ellipse">
@@ -8488,8 +8488,8 @@
         </p:nvSpPr>
         <p:spPr>
           <a:xfrm>
-            <a:off x="9067038" y="3190494"/>
-            <a:ext cx="408432" cy="381000"/>
+            <a:off x="8956294" y="3126994"/>
+            <a:ext cx="508000" cy="508000"/>
           </a:xfrm>
           <a:prstGeom prst="rect">
             <a:avLst/>
@@ -8505,7 +8505,7 @@
               <a:buNone/>
             </a:pPr>
             <a:r>
-              <a:rPr lang="ko-KR" altLang="en-US" sz="2400" b="1" dirty="0">
+              <a:rPr lang="ko-KR" altLang="en-US" sz="3200" b="1" dirty="0">
                 <a:solidFill>
                   <a:srgbClr val="1F2937"/>
                 </a:solidFill>
@@ -8515,7 +8515,7 @@
               </a:rPr>
               <a:t>ㄱ</a:t>
             </a:r>
-            <a:endParaRPr lang="ko-KR" sz="2400" dirty="0"/>
+            <a:endParaRPr lang="ko-KR" sz="3200" dirty="0"/>
           </a:p>
         </p:txBody>
       </p:sp>
@@ -8527,8 +8527,8 @@
         </p:nvSpPr>
         <p:spPr>
           <a:xfrm>
-            <a:off x="10321290" y="3190494"/>
-            <a:ext cx="408432" cy="381000"/>
+            <a:off x="10332466" y="3126994"/>
+            <a:ext cx="508000" cy="508000"/>
           </a:xfrm>
           <a:prstGeom prst="rect">
             <a:avLst/>
@@ -8544,7 +8544,7 @@
               <a:buNone/>
             </a:pPr>
             <a:r>
-              <a:rPr lang="ko-KR" altLang="en-US" sz="2400" b="1" dirty="0">
+              <a:rPr lang="ko-KR" altLang="en-US" sz="3200" b="1" dirty="0">
                 <a:solidFill>
                   <a:srgbClr val="1F2937"/>
                 </a:solidFill>
@@ -8554,7 +8554,7 @@
               </a:rPr>
               <a:t>ㄴ</a:t>
             </a:r>
-            <a:endParaRPr lang="ko-KR" sz="2400" dirty="0"/>
+            <a:endParaRPr lang="ko-KR" sz="3200" dirty="0"/>
           </a:p>
         </p:txBody>
       </p:sp>
@@ -8936,8 +8936,8 @@
         </p:nvSpPr>
         <p:spPr>
           <a:xfrm>
-            <a:off x="2138934" y="3137154"/>
-            <a:ext cx="3307842" cy="0"/>
+            <a:off x="2077974" y="3137154"/>
+            <a:ext cx="3490722" cy="0"/>
           </a:xfrm>
           <a:prstGeom prst="line">
             <a:avLst/>
@@ -8959,7 +8959,7 @@
         </p:nvSpPr>
         <p:spPr>
           <a:xfrm>
-            <a:off x="2079498" y="3077718"/>
+            <a:off x="2018538" y="3077718"/>
             <a:ext cx="118872" cy="118872"/>
           </a:xfrm>
           <a:prstGeom prst="ellipse">
@@ -8984,7 +8984,7 @@
         </p:nvSpPr>
         <p:spPr>
           <a:xfrm>
-            <a:off x="4284726" y="3077718"/>
+            <a:off x="4345686" y="3077718"/>
             <a:ext cx="118872" cy="118872"/>
           </a:xfrm>
           <a:prstGeom prst="ellipse">
@@ -9009,8 +9009,8 @@
         </p:nvSpPr>
         <p:spPr>
           <a:xfrm>
-            <a:off x="1934718" y="3190494"/>
-            <a:ext cx="408432" cy="381000"/>
+            <a:off x="1823974" y="3126994"/>
+            <a:ext cx="508000" cy="508000"/>
           </a:xfrm>
           <a:prstGeom prst="rect">
             <a:avLst/>
@@ -9026,7 +9026,7 @@
               <a:buNone/>
             </a:pPr>
             <a:r>
-              <a:rPr lang="ko-KR" altLang="en-US" sz="2400" b="1" dirty="0">
+              <a:rPr lang="ko-KR" altLang="en-US" sz="3200" b="1" dirty="0">
                 <a:solidFill>
                   <a:srgbClr val="1F2937"/>
                 </a:solidFill>
@@ -9036,7 +9036,7 @@
               </a:rPr>
               <a:t>ㄱ</a:t>
             </a:r>
-            <a:endParaRPr lang="ko-KR" sz="2400" dirty="0"/>
+            <a:endParaRPr lang="ko-KR" sz="3200" dirty="0"/>
           </a:p>
         </p:txBody>
       </p:sp>
@@ -9048,8 +9048,8 @@
         </p:nvSpPr>
         <p:spPr>
           <a:xfrm>
-            <a:off x="4139946" y="3190494"/>
-            <a:ext cx="408432" cy="381000"/>
+            <a:off x="4151122" y="3126994"/>
+            <a:ext cx="508000" cy="508000"/>
           </a:xfrm>
           <a:prstGeom prst="rect">
             <a:avLst/>
@@ -9065,7 +9065,7 @@
               <a:buNone/>
             </a:pPr>
             <a:r>
-              <a:rPr lang="ko-KR" altLang="en-US" sz="2400" b="1" dirty="0">
+              <a:rPr lang="ko-KR" altLang="en-US" sz="3200" b="1" dirty="0">
                 <a:solidFill>
                   <a:srgbClr val="1F2937"/>
                 </a:solidFill>
@@ -9075,7 +9075,7 @@
               </a:rPr>
               <a:t>ㄴ</a:t>
             </a:r>
-            <a:endParaRPr lang="ko-KR" sz="2400" dirty="0"/>
+            <a:endParaRPr lang="ko-KR" sz="3200" dirty="0"/>
           </a:p>
         </p:txBody>
       </p:sp>
@@ -9126,8 +9126,8 @@
         </p:nvSpPr>
         <p:spPr>
           <a:xfrm flipH="1">
-            <a:off x="6742176" y="3137154"/>
-            <a:ext cx="3307842" cy="0"/>
+            <a:off x="6620256" y="3137154"/>
+            <a:ext cx="3490722" cy="0"/>
           </a:xfrm>
           <a:prstGeom prst="line">
             <a:avLst/>
@@ -9149,7 +9149,7 @@
         </p:nvSpPr>
         <p:spPr>
           <a:xfrm>
-            <a:off x="9990582" y="3077718"/>
+            <a:off x="10051542" y="3077718"/>
             <a:ext cx="118872" cy="118872"/>
           </a:xfrm>
           <a:prstGeom prst="ellipse">
@@ -9174,7 +9174,7 @@
         </p:nvSpPr>
         <p:spPr>
           <a:xfrm>
-            <a:off x="7785354" y="3077718"/>
+            <a:off x="7724394" y="3077718"/>
             <a:ext cx="118872" cy="118872"/>
           </a:xfrm>
           <a:prstGeom prst="ellipse">
@@ -9199,8 +9199,8 @@
         </p:nvSpPr>
         <p:spPr>
           <a:xfrm>
-            <a:off x="9845802" y="3190494"/>
-            <a:ext cx="408432" cy="381000"/>
+            <a:off x="9856978" y="3126994"/>
+            <a:ext cx="508000" cy="508000"/>
           </a:xfrm>
           <a:prstGeom prst="rect">
             <a:avLst/>
@@ -9216,7 +9216,7 @@
               <a:buNone/>
             </a:pPr>
             <a:r>
-              <a:rPr lang="ko-KR" altLang="en-US" sz="2400" b="1" dirty="0">
+              <a:rPr lang="ko-KR" altLang="en-US" sz="3200" b="1" dirty="0">
                 <a:solidFill>
                   <a:srgbClr val="1F2937"/>
                 </a:solidFill>
@@ -9226,7 +9226,7 @@
               </a:rPr>
               <a:t>ㄴ</a:t>
             </a:r>
-            <a:endParaRPr lang="ko-KR" sz="2400" dirty="0"/>
+            <a:endParaRPr lang="ko-KR" sz="3200" dirty="0"/>
           </a:p>
         </p:txBody>
       </p:sp>
@@ -9238,8 +9238,8 @@
         </p:nvSpPr>
         <p:spPr>
           <a:xfrm>
-            <a:off x="7640574" y="3190494"/>
-            <a:ext cx="408432" cy="381000"/>
+            <a:off x="7529830" y="3126994"/>
+            <a:ext cx="508000" cy="508000"/>
           </a:xfrm>
           <a:prstGeom prst="rect">
             <a:avLst/>
@@ -9255,7 +9255,7 @@
               <a:buNone/>
             </a:pPr>
             <a:r>
-              <a:rPr lang="ko-KR" altLang="en-US" sz="2400" b="1" dirty="0">
+              <a:rPr lang="ko-KR" altLang="en-US" sz="3200" b="1" dirty="0">
                 <a:solidFill>
                   <a:srgbClr val="1F2937"/>
                 </a:solidFill>
@@ -9265,7 +9265,7 @@
               </a:rPr>
               <a:t>ㄱ</a:t>
             </a:r>
-            <a:endParaRPr lang="ko-KR" sz="2400" dirty="0"/>
+            <a:endParaRPr lang="ko-KR" sz="3200" dirty="0"/>
           </a:p>
         </p:txBody>
       </p:sp>
@@ -9585,8 +9585,8 @@
         </p:nvSpPr>
         <p:spPr>
           <a:xfrm>
-            <a:off x="1860042" y="2499360"/>
-            <a:ext cx="3535680" cy="441960"/>
+            <a:off x="1799082" y="2491740"/>
+            <a:ext cx="3657600" cy="457200"/>
           </a:xfrm>
           <a:prstGeom prst="line">
             <a:avLst/>
@@ -9608,7 +9608,7 @@
         </p:nvSpPr>
         <p:spPr>
           <a:xfrm>
-            <a:off x="1800606" y="2439924"/>
+            <a:off x="1739646" y="2432304"/>
             <a:ext cx="118872" cy="118872"/>
           </a:xfrm>
           <a:prstGeom prst="ellipse">
@@ -9633,7 +9633,7 @@
         </p:nvSpPr>
         <p:spPr>
           <a:xfrm>
-            <a:off x="5336286" y="2881884"/>
+            <a:off x="5397246" y="2889504"/>
             <a:ext cx="118872" cy="118872"/>
           </a:xfrm>
           <a:prstGeom prst="ellipse">
@@ -9658,8 +9658,8 @@
         </p:nvSpPr>
         <p:spPr>
           <a:xfrm>
-            <a:off x="1413869" y="2278615"/>
-            <a:ext cx="408432" cy="381000"/>
+            <a:off x="1303125" y="2207495"/>
+            <a:ext cx="508000" cy="508000"/>
           </a:xfrm>
           <a:prstGeom prst="rect">
             <a:avLst/>
@@ -9675,7 +9675,7 @@
               <a:buNone/>
             </a:pPr>
             <a:r>
-              <a:rPr lang="ko-KR" altLang="en-US" sz="2400" b="1" dirty="0">
+              <a:rPr lang="ko-KR" altLang="en-US" sz="3200" b="1" dirty="0">
                 <a:solidFill>
                   <a:srgbClr val="1F2937"/>
                 </a:solidFill>
@@ -9685,7 +9685,7 @@
               </a:rPr>
               <a:t>ㄷ</a:t>
             </a:r>
-            <a:endParaRPr lang="ko-KR" sz="2400" dirty="0"/>
+            <a:endParaRPr lang="ko-KR" sz="3200" dirty="0"/>
           </a:p>
         </p:txBody>
       </p:sp>
@@ -9697,8 +9697,8 @@
         </p:nvSpPr>
         <p:spPr>
           <a:xfrm>
-            <a:off x="5433463" y="2781065"/>
-            <a:ext cx="408432" cy="381000"/>
+            <a:off x="5444639" y="2725185"/>
+            <a:ext cx="508000" cy="508000"/>
           </a:xfrm>
           <a:prstGeom prst="rect">
             <a:avLst/>
@@ -9714,7 +9714,7 @@
               <a:buNone/>
             </a:pPr>
             <a:r>
-              <a:rPr lang="ko-KR" altLang="en-US" sz="2400" b="1" dirty="0">
+              <a:rPr lang="ko-KR" altLang="en-US" sz="3200" b="1" dirty="0">
                 <a:solidFill>
                   <a:srgbClr val="1F2937"/>
                 </a:solidFill>
@@ -9724,7 +9724,7 @@
               </a:rPr>
               <a:t>ㄹ</a:t>
             </a:r>
-            <a:endParaRPr lang="ko-KR" sz="2400" dirty="0"/>
+            <a:endParaRPr lang="ko-KR" sz="3200" dirty="0"/>
           </a:p>
         </p:txBody>
       </p:sp>
@@ -9783,8 +9783,8 @@
         </p:nvSpPr>
         <p:spPr>
           <a:xfrm flipV="1">
-            <a:off x="7699248" y="2499360"/>
-            <a:ext cx="3314700" cy="441960"/>
+            <a:off x="7356348" y="2453640"/>
+            <a:ext cx="4000500" cy="533400"/>
           </a:xfrm>
           <a:prstGeom prst="line">
             <a:avLst/>
@@ -9806,7 +9806,7 @@
         </p:nvSpPr>
         <p:spPr>
           <a:xfrm>
-            <a:off x="8464836" y="2771881"/>
+            <a:off x="8292631" y="2794841"/>
             <a:ext cx="118872" cy="118872"/>
           </a:xfrm>
           <a:prstGeom prst="ellipse">
@@ -9831,7 +9831,7 @@
         </p:nvSpPr>
         <p:spPr>
           <a:xfrm>
-            <a:off x="10129488" y="2549927"/>
+            <a:off x="10301693" y="2526967"/>
             <a:ext cx="118872" cy="118872"/>
           </a:xfrm>
           <a:prstGeom prst="ellipse">
@@ -9856,8 +9856,8 @@
         </p:nvSpPr>
         <p:spPr>
           <a:xfrm>
-            <a:off x="8287830" y="2399116"/>
-            <a:ext cx="408432" cy="381000"/>
+            <a:off x="8065840" y="2358576"/>
+            <a:ext cx="508000" cy="508000"/>
           </a:xfrm>
           <a:prstGeom prst="rect">
             <a:avLst/>
@@ -9873,7 +9873,7 @@
               <a:buNone/>
             </a:pPr>
             <a:r>
-              <a:rPr lang="ko-KR" altLang="en-US" sz="2400" b="1" dirty="0">
+              <a:rPr lang="ko-KR" altLang="en-US" sz="3200" b="1" dirty="0">
                 <a:solidFill>
                   <a:srgbClr val="1F2937"/>
                 </a:solidFill>
@@ -9883,7 +9883,7 @@
               </a:rPr>
               <a:t>ㅁ</a:t>
             </a:r>
-            <a:endParaRPr lang="ko-KR" sz="2400" dirty="0"/>
+            <a:endParaRPr lang="ko-KR" sz="3200" dirty="0"/>
           </a:p>
         </p:txBody>
       </p:sp>
@@ -9895,8 +9895,8 @@
         </p:nvSpPr>
         <p:spPr>
           <a:xfrm>
-            <a:off x="9952481" y="2177162"/>
-            <a:ext cx="408432" cy="381000"/>
+            <a:off x="10074902" y="2090702"/>
+            <a:ext cx="508000" cy="508000"/>
           </a:xfrm>
           <a:prstGeom prst="rect">
             <a:avLst/>
@@ -9912,7 +9912,7 @@
               <a:buNone/>
             </a:pPr>
             <a:r>
-              <a:rPr lang="ko-KR" altLang="en-US" sz="2400" b="1" dirty="0">
+              <a:rPr lang="ko-KR" altLang="en-US" sz="3200" b="1" dirty="0">
                 <a:solidFill>
                   <a:srgbClr val="1F2937"/>
                 </a:solidFill>
@@ -9922,7 +9922,7 @@
               </a:rPr>
               <a:t>ㅂ</a:t>
             </a:r>
-            <a:endParaRPr lang="ko-KR" sz="2400" dirty="0"/>
+            <a:endParaRPr lang="ko-KR" sz="3200" dirty="0"/>
           </a:p>
         </p:txBody>
       </p:sp>
@@ -9981,8 +9981,8 @@
         </p:nvSpPr>
         <p:spPr>
           <a:xfrm>
-            <a:off x="1831848" y="4411980"/>
-            <a:ext cx="3592068" cy="0"/>
+            <a:off x="1627632" y="4411980"/>
+            <a:ext cx="4000500" cy="0"/>
           </a:xfrm>
           <a:prstGeom prst="line">
             <a:avLst/>
@@ -10004,7 +10004,7 @@
         </p:nvSpPr>
         <p:spPr>
           <a:xfrm>
-            <a:off x="1772412" y="4352544"/>
+            <a:off x="1568196" y="4352544"/>
             <a:ext cx="118872" cy="118872"/>
           </a:xfrm>
           <a:prstGeom prst="ellipse">
@@ -10029,7 +10029,7 @@
         </p:nvSpPr>
         <p:spPr>
           <a:xfrm>
-            <a:off x="4167124" y="4352544"/>
+            <a:off x="4235196" y="4352544"/>
             <a:ext cx="118872" cy="118872"/>
           </a:xfrm>
           <a:prstGeom prst="ellipse">
@@ -10054,8 +10054,8 @@
         </p:nvSpPr>
         <p:spPr>
           <a:xfrm>
-            <a:off x="1383792" y="4221480"/>
-            <a:ext cx="408432" cy="381000"/>
+            <a:off x="1129792" y="4157980"/>
+            <a:ext cx="508000" cy="508000"/>
           </a:xfrm>
           <a:prstGeom prst="rect">
             <a:avLst/>
@@ -10071,7 +10071,7 @@
               <a:buNone/>
             </a:pPr>
             <a:r>
-              <a:rPr lang="ko-KR" altLang="en-US" sz="2400" b="1" dirty="0">
+              <a:rPr lang="ko-KR" altLang="en-US" sz="3200" b="1" dirty="0">
                 <a:solidFill>
                   <a:srgbClr val="1F2937"/>
                 </a:solidFill>
@@ -10081,7 +10081,7 @@
               </a:rPr>
               <a:t>ㅅ</a:t>
             </a:r>
-            <a:endParaRPr lang="ko-KR" sz="2400" dirty="0"/>
+            <a:endParaRPr lang="ko-KR" sz="3200" dirty="0"/>
           </a:p>
         </p:txBody>
       </p:sp>
@@ -10093,8 +10093,8 @@
         </p:nvSpPr>
         <p:spPr>
           <a:xfrm>
-            <a:off x="4022344" y="3977640"/>
-            <a:ext cx="408432" cy="381000"/>
+            <a:off x="4040632" y="3914140"/>
+            <a:ext cx="508000" cy="508000"/>
           </a:xfrm>
           <a:prstGeom prst="rect">
             <a:avLst/>
@@ -10110,7 +10110,7 @@
               <a:buNone/>
             </a:pPr>
             <a:r>
-              <a:rPr lang="ko-KR" altLang="en-US" sz="2400" b="1" dirty="0">
+              <a:rPr lang="ko-KR" altLang="en-US" sz="3200" b="1" dirty="0">
                 <a:solidFill>
                   <a:srgbClr val="1F2937"/>
                 </a:solidFill>
@@ -10120,7 +10120,7 @@
               </a:rPr>
               <a:t>ㅇ</a:t>
             </a:r>
-            <a:endParaRPr lang="ko-KR" sz="2400" dirty="0"/>
+            <a:endParaRPr lang="ko-KR" sz="3200" dirty="0"/>
           </a:p>
         </p:txBody>
       </p:sp>
@@ -10179,8 +10179,8 @@
         </p:nvSpPr>
         <p:spPr>
           <a:xfrm flipH="1" flipV="1">
-            <a:off x="7699248" y="4191000"/>
-            <a:ext cx="3314700" cy="441960"/>
+            <a:off x="7356348" y="4145280"/>
+            <a:ext cx="4000500" cy="533400"/>
           </a:xfrm>
           <a:prstGeom prst="line">
             <a:avLst/>
@@ -10202,7 +10202,7 @@
         </p:nvSpPr>
         <p:spPr>
           <a:xfrm>
-            <a:off x="10954512" y="4573524"/>
+            <a:off x="11297412" y="4619244"/>
             <a:ext cx="118872" cy="118872"/>
           </a:xfrm>
           <a:prstGeom prst="ellipse">
@@ -10227,7 +10227,7 @@
         </p:nvSpPr>
         <p:spPr>
           <a:xfrm>
-            <a:off x="8738232" y="4278020"/>
+            <a:off x="8622591" y="4262601"/>
             <a:ext cx="118872" cy="118872"/>
           </a:xfrm>
           <a:prstGeom prst="ellipse">
@@ -10252,8 +10252,8 @@
         </p:nvSpPr>
         <p:spPr>
           <a:xfrm>
-            <a:off x="11051433" y="4474687"/>
-            <a:ext cx="408432" cy="381000"/>
+            <a:off x="11344549" y="4456907"/>
+            <a:ext cx="508000" cy="508000"/>
           </a:xfrm>
           <a:prstGeom prst="rect">
             <a:avLst/>
@@ -10269,7 +10269,7 @@
               <a:buNone/>
             </a:pPr>
             <a:r>
-              <a:rPr lang="ko-KR" altLang="en-US" sz="2400" b="1" dirty="0">
+              <a:rPr lang="ko-KR" altLang="en-US" sz="3200" b="1" dirty="0">
                 <a:solidFill>
                   <a:srgbClr val="1F2937"/>
                 </a:solidFill>
@@ -10279,7 +10279,7 @@
               </a:rPr>
               <a:t>ㅊ</a:t>
             </a:r>
-            <a:endParaRPr lang="ko-KR" sz="2400" dirty="0"/>
+            <a:endParaRPr lang="ko-KR" sz="3200" dirty="0"/>
           </a:p>
         </p:txBody>
       </p:sp>
@@ -10291,8 +10291,8 @@
         </p:nvSpPr>
         <p:spPr>
           <a:xfrm>
-            <a:off x="8625678" y="3905255"/>
-            <a:ext cx="408432" cy="381000"/>
+            <a:off x="8460254" y="3826336"/>
+            <a:ext cx="508000" cy="508000"/>
           </a:xfrm>
           <a:prstGeom prst="rect">
             <a:avLst/>
@@ -10308,7 +10308,7 @@
               <a:buNone/>
             </a:pPr>
             <a:r>
-              <a:rPr lang="ko-KR" altLang="en-US" sz="2400" b="1" dirty="0">
+              <a:rPr lang="ko-KR" altLang="en-US" sz="3200" b="1" dirty="0">
                 <a:solidFill>
                   <a:srgbClr val="1F2937"/>
                 </a:solidFill>
@@ -10318,7 +10318,7 @@
               </a:rPr>
               <a:t>ㅈ</a:t>
             </a:r>
-            <a:endParaRPr lang="ko-KR" sz="2400" dirty="0"/>
+            <a:endParaRPr lang="ko-KR" sz="3200" dirty="0"/>
           </a:p>
         </p:txBody>
       </p:sp>
@@ -11215,7 +11215,7 @@
         </p:nvSpPr>
         <p:spPr>
           <a:xfrm>
-            <a:off x="1288534" y="4236720"/>
+            <a:off x="1111923" y="4358640"/>
             <a:ext cx="792480" cy="792480"/>
           </a:xfrm>
           <a:prstGeom prst="pie">
@@ -11243,8 +11243,8 @@
         </p:nvSpPr>
         <p:spPr>
           <a:xfrm flipV="1">
-            <a:off x="1684774" y="2499360"/>
-            <a:ext cx="1312985" cy="2133600"/>
+            <a:off x="1508163" y="2377440"/>
+            <a:ext cx="1463040" cy="2377440"/>
           </a:xfrm>
           <a:prstGeom prst="line">
             <a:avLst/>
@@ -11266,8 +11266,8 @@
         </p:nvSpPr>
         <p:spPr>
           <a:xfrm>
-            <a:off x="1684774" y="4632960"/>
-            <a:ext cx="3090688" cy="0"/>
+            <a:off x="1508163" y="4754880"/>
+            <a:ext cx="3443910" cy="0"/>
           </a:xfrm>
           <a:prstGeom prst="line">
             <a:avLst/>
@@ -11289,7 +11289,7 @@
         </p:nvSpPr>
         <p:spPr>
           <a:xfrm>
-            <a:off x="2614358" y="2966366"/>
+            <a:off x="2550778" y="2904611"/>
             <a:ext cx="118872" cy="118872"/>
           </a:xfrm>
           <a:prstGeom prst="ellipse">
@@ -11314,7 +11314,7 @@
         </p:nvSpPr>
         <p:spPr>
           <a:xfrm>
-            <a:off x="1625338" y="4573524"/>
+            <a:off x="1448727" y="4695444"/>
             <a:ext cx="118872" cy="118872"/>
           </a:xfrm>
           <a:prstGeom prst="ellipse">
@@ -11339,7 +11339,7 @@
         </p:nvSpPr>
         <p:spPr>
           <a:xfrm>
-            <a:off x="4097888" y="4573524"/>
+            <a:off x="4203855" y="4695444"/>
             <a:ext cx="118872" cy="118872"/>
           </a:xfrm>
           <a:prstGeom prst="ellipse">
@@ -11364,8 +11364,8 @@
         </p:nvSpPr>
         <p:spPr>
           <a:xfrm>
-            <a:off x="2261910" y="2707506"/>
-            <a:ext cx="408432" cy="381000"/>
+            <a:off x="2148546" y="2582251"/>
+            <a:ext cx="508000" cy="508000"/>
           </a:xfrm>
           <a:prstGeom prst="rect">
             <a:avLst/>
@@ -11381,7 +11381,7 @@
               <a:buNone/>
             </a:pPr>
             <a:r>
-              <a:rPr lang="ko-KR" altLang="en-US" sz="2400" b="1" dirty="0">
+              <a:rPr lang="ko-KR" altLang="en-US" sz="3200" b="1" dirty="0">
                 <a:solidFill>
                   <a:srgbClr val="1F2937"/>
                 </a:solidFill>
@@ -11391,7 +11391,7 @@
               </a:rPr>
               <a:t>ㄱ</a:t>
             </a:r>
-            <a:endParaRPr lang="ko-KR" sz="2400" dirty="0"/>
+            <a:endParaRPr lang="ko-KR" sz="3200" dirty="0"/>
           </a:p>
         </p:txBody>
       </p:sp>
@@ -11403,8 +11403,8 @@
         </p:nvSpPr>
         <p:spPr>
           <a:xfrm>
-            <a:off x="1267697" y="4561406"/>
-            <a:ext cx="408432" cy="381000"/>
+            <a:off x="1041302" y="4619826"/>
+            <a:ext cx="508000" cy="508000"/>
           </a:xfrm>
           <a:prstGeom prst="rect">
             <a:avLst/>
@@ -11420,7 +11420,7 @@
               <a:buNone/>
             </a:pPr>
             <a:r>
-              <a:rPr lang="ko-KR" altLang="en-US" sz="2400" b="1" dirty="0">
+              <a:rPr lang="ko-KR" altLang="en-US" sz="3200" b="1" dirty="0">
                 <a:solidFill>
                   <a:srgbClr val="1F2937"/>
                 </a:solidFill>
@@ -11430,7 +11430,7 @@
               </a:rPr>
               <a:t>ㄴ</a:t>
             </a:r>
-            <a:endParaRPr lang="ko-KR" sz="2400" dirty="0"/>
+            <a:endParaRPr lang="ko-KR" sz="3200" dirty="0"/>
           </a:p>
         </p:txBody>
       </p:sp>
@@ -11442,8 +11442,8 @@
         </p:nvSpPr>
         <p:spPr>
           <a:xfrm>
-            <a:off x="3953108" y="4198620"/>
-            <a:ext cx="408432" cy="381000"/>
+            <a:off x="4009291" y="4257040"/>
+            <a:ext cx="508000" cy="508000"/>
           </a:xfrm>
           <a:prstGeom prst="rect">
             <a:avLst/>
@@ -11459,7 +11459,7 @@
               <a:buNone/>
             </a:pPr>
             <a:r>
-              <a:rPr lang="ko-KR" altLang="en-US" sz="2400" b="1" dirty="0">
+              <a:rPr lang="ko-KR" altLang="en-US" sz="3200" b="1" dirty="0">
                 <a:solidFill>
                   <a:srgbClr val="1F2937"/>
                 </a:solidFill>
@@ -11469,7 +11469,7 @@
               </a:rPr>
               <a:t>ㄷ</a:t>
             </a:r>
-            <a:endParaRPr lang="ko-KR" sz="2400" dirty="0"/>
+            <a:endParaRPr lang="ko-KR" sz="3200" dirty="0"/>
           </a:p>
         </p:txBody>
       </p:sp>
@@ -11881,7 +11881,7 @@
         </p:nvSpPr>
         <p:spPr>
           <a:xfrm>
-            <a:off x="7329687" y="4236720"/>
+            <a:off x="7188783" y="4358640"/>
             <a:ext cx="792480" cy="792480"/>
           </a:xfrm>
           <a:prstGeom prst="pie">
@@ -11909,8 +11909,8 @@
         </p:nvSpPr>
         <p:spPr>
           <a:xfrm flipV="1">
-            <a:off x="7725927" y="3948011"/>
-            <a:ext cx="2465815" cy="684949"/>
+            <a:off x="7585023" y="3991652"/>
+            <a:ext cx="2747622" cy="763228"/>
           </a:xfrm>
           <a:prstGeom prst="line">
             <a:avLst/>
@@ -11932,8 +11932,8 @@
         </p:nvSpPr>
         <p:spPr>
           <a:xfrm flipV="1">
-            <a:off x="7725927" y="2499360"/>
-            <a:ext cx="711200" cy="2133600"/>
+            <a:off x="7585023" y="2377440"/>
+            <a:ext cx="792480" cy="2377440"/>
           </a:xfrm>
           <a:prstGeom prst="line">
             <a:avLst/>
@@ -11955,7 +11955,7 @@
         </p:nvSpPr>
         <p:spPr>
           <a:xfrm>
-            <a:off x="9611686" y="4033192"/>
+            <a:off x="9693090" y="4093360"/>
             <a:ext cx="118872" cy="118872"/>
           </a:xfrm>
           <a:prstGeom prst="ellipse">
@@ -11980,7 +11980,7 @@
         </p:nvSpPr>
         <p:spPr>
           <a:xfrm>
-            <a:off x="7666491" y="4573524"/>
+            <a:off x="7525587" y="4695444"/>
             <a:ext cx="118872" cy="118872"/>
           </a:xfrm>
           <a:prstGeom prst="ellipse">
@@ -12005,7 +12005,7 @@
         </p:nvSpPr>
         <p:spPr>
           <a:xfrm>
-            <a:off x="8206823" y="2952528"/>
+            <a:off x="8127671" y="2889191"/>
             <a:ext cx="118872" cy="118872"/>
           </a:xfrm>
           <a:prstGeom prst="ellipse">
@@ -12030,8 +12030,8 @@
         </p:nvSpPr>
         <p:spPr>
           <a:xfrm>
-            <a:off x="9401644" y="3667184"/>
-            <a:ext cx="408432" cy="381000"/>
+            <a:off x="9433264" y="3663852"/>
+            <a:ext cx="508000" cy="508000"/>
           </a:xfrm>
           <a:prstGeom prst="rect">
             <a:avLst/>
@@ -12047,7 +12047,7 @@
               <a:buNone/>
             </a:pPr>
             <a:r>
-              <a:rPr lang="ko-KR" altLang="en-US" sz="2400" b="1" dirty="0">
+              <a:rPr lang="ko-KR" altLang="en-US" sz="3200" b="1" dirty="0">
                 <a:solidFill>
                   <a:srgbClr val="1F2937"/>
                 </a:solidFill>
@@ -12057,7 +12057,7 @@
               </a:rPr>
               <a:t>ㄹ</a:t>
             </a:r>
-            <a:endParaRPr lang="ko-KR" sz="2400" dirty="0"/>
+            <a:endParaRPr lang="ko-KR" sz="3200" dirty="0"/>
           </a:p>
         </p:txBody>
       </p:sp>
@@ -12069,8 +12069,8 @@
         </p:nvSpPr>
         <p:spPr>
           <a:xfrm>
-            <a:off x="7344966" y="4610446"/>
-            <a:ext cx="408432" cy="381000"/>
+            <a:off x="7154278" y="4668866"/>
+            <a:ext cx="508000" cy="508000"/>
           </a:xfrm>
           <a:prstGeom prst="rect">
             <a:avLst/>
@@ -12086,7 +12086,7 @@
               <a:buNone/>
             </a:pPr>
             <a:r>
-              <a:rPr lang="ko-KR" altLang="en-US" sz="2400" b="1" dirty="0">
+              <a:rPr lang="ko-KR" altLang="en-US" sz="3200" b="1" dirty="0">
                 <a:solidFill>
                   <a:srgbClr val="1F2937"/>
                 </a:solidFill>
@@ -12096,7 +12096,7 @@
               </a:rPr>
               <a:t>ㅁ</a:t>
             </a:r>
-            <a:endParaRPr lang="ko-KR" sz="2400" dirty="0"/>
+            <a:endParaRPr lang="ko-KR" sz="3200" dirty="0"/>
           </a:p>
         </p:txBody>
       </p:sp>
@@ -12108,8 +12108,8 @@
         </p:nvSpPr>
         <p:spPr>
           <a:xfrm>
-            <a:off x="7830716" y="2744355"/>
-            <a:ext cx="408432" cy="381000"/>
+            <a:off x="7701780" y="2617518"/>
+            <a:ext cx="508000" cy="508000"/>
           </a:xfrm>
           <a:prstGeom prst="rect">
             <a:avLst/>
@@ -12125,7 +12125,7 @@
               <a:buNone/>
             </a:pPr>
             <a:r>
-              <a:rPr lang="ko-KR" altLang="en-US" sz="2400" b="1" dirty="0">
+              <a:rPr lang="ko-KR" altLang="en-US" sz="3200" b="1" dirty="0">
                 <a:solidFill>
                   <a:srgbClr val="1F2937"/>
                 </a:solidFill>
@@ -12135,7 +12135,7 @@
               </a:rPr>
               <a:t>ㅂ</a:t>
             </a:r>
-            <a:endParaRPr lang="ko-KR" sz="2400" dirty="0"/>
+            <a:endParaRPr lang="ko-KR" sz="3200" dirty="0"/>
           </a:p>
         </p:txBody>
       </p:sp>
